--- a/public/videos/repositories/like-mangavi/like-mangavi-tech-preview.pptx
+++ b/public/videos/repositories/like-mangavi/like-mangavi-tech-preview.pptx
@@ -134,7 +134,7 @@
           <p:cNvPr id="2" name="タイトル 1">
             <a:extLst>
               <a:ext uri="{FF2B5EF4-FFF2-40B4-BE49-F238E27FC236}">
-                <a16:creationId xmlns:a16="http://schemas.microsoft.com/office/drawing/2014/main" id="{F3B9C326-9F26-4BBB-AA56-321FD82E9E16}"/>
+                <a16:creationId xmlns:a16="http://schemas.microsoft.com/office/drawing/2014/main" id="{961102AC-AB78-B807-1560-BBC9447F8C0C}"/>
               </a:ext>
             </a:extLst>
           </p:cNvPr>
@@ -171,7 +171,7 @@
           <p:cNvPr id="3" name="字幕 2">
             <a:extLst>
               <a:ext uri="{FF2B5EF4-FFF2-40B4-BE49-F238E27FC236}">
-                <a16:creationId xmlns:a16="http://schemas.microsoft.com/office/drawing/2014/main" id="{C7122A06-155E-45DC-7126-11CF4E2275FA}"/>
+                <a16:creationId xmlns:a16="http://schemas.microsoft.com/office/drawing/2014/main" id="{D88F588D-EC2E-6F74-C0E0-FE1513B37EE0}"/>
               </a:ext>
             </a:extLst>
           </p:cNvPr>
@@ -241,7 +241,7 @@
           <p:cNvPr id="4" name="日付プレースホルダー 3">
             <a:extLst>
               <a:ext uri="{FF2B5EF4-FFF2-40B4-BE49-F238E27FC236}">
-                <a16:creationId xmlns:a16="http://schemas.microsoft.com/office/drawing/2014/main" id="{53B5507A-70DD-E1BC-4197-E4C60257A245}"/>
+                <a16:creationId xmlns:a16="http://schemas.microsoft.com/office/drawing/2014/main" id="{A4C51AFE-0F12-7CDB-0B52-1DBC8B7A8A02}"/>
               </a:ext>
             </a:extLst>
           </p:cNvPr>
@@ -257,7 +257,7 @@
           <a:bodyPr/>
           <a:lstStyle/>
           <a:p>
-            <a:fld id="{98DE8F79-B99D-4E54-A19E-CB4CEA7E403A}" type="datetimeFigureOut">
+            <a:fld id="{DF6CADF0-1665-4BC8-B3C5-0BBB871F1254}" type="datetimeFigureOut">
               <a:rPr kumimoji="1" lang="ja-JP" altLang="en-US" smtClean="0"/>
               <a:t>2026/7/30</a:t>
             </a:fld>
@@ -270,7 +270,7 @@
           <p:cNvPr id="5" name="フッター プレースホルダー 4">
             <a:extLst>
               <a:ext uri="{FF2B5EF4-FFF2-40B4-BE49-F238E27FC236}">
-                <a16:creationId xmlns:a16="http://schemas.microsoft.com/office/drawing/2014/main" id="{957764FA-8E14-375A-C63A-E7E62C4944BA}"/>
+                <a16:creationId xmlns:a16="http://schemas.microsoft.com/office/drawing/2014/main" id="{7175A98C-854E-4403-3BDC-1C14DAC86197}"/>
               </a:ext>
             </a:extLst>
           </p:cNvPr>
@@ -295,7 +295,7 @@
           <p:cNvPr id="6" name="スライド番号プレースホルダー 5">
             <a:extLst>
               <a:ext uri="{FF2B5EF4-FFF2-40B4-BE49-F238E27FC236}">
-                <a16:creationId xmlns:a16="http://schemas.microsoft.com/office/drawing/2014/main" id="{D0FD8A88-ADB2-1A76-934B-F740A15C72F4}"/>
+                <a16:creationId xmlns:a16="http://schemas.microsoft.com/office/drawing/2014/main" id="{07A1922A-B767-E700-5D9D-137ADEC703C5}"/>
               </a:ext>
             </a:extLst>
           </p:cNvPr>
@@ -311,7 +311,7 @@
           <a:bodyPr/>
           <a:lstStyle/>
           <a:p>
-            <a:fld id="{8006A63A-9CAB-4E2F-8172-2D3D695CD31B}" type="slidenum">
+            <a:fld id="{537599D8-0CB8-4E5D-BC9F-0F9D371EE2FC}" type="slidenum">
               <a:rPr kumimoji="1" lang="ja-JP" altLang="en-US" smtClean="0"/>
               <a:t>‹#›</a:t>
             </a:fld>
@@ -322,7 +322,7 @@
     </p:spTree>
     <p:extLst>
       <p:ext uri="{BB962C8B-B14F-4D97-AF65-F5344CB8AC3E}">
-        <p14:creationId xmlns:p14="http://schemas.microsoft.com/office/powerpoint/2010/main" val="109066299"/>
+        <p14:creationId xmlns:p14="http://schemas.microsoft.com/office/powerpoint/2010/main" val="1419999211"/>
       </p:ext>
     </p:extLst>
   </p:cSld>
@@ -354,7 +354,7 @@
           <p:cNvPr id="2" name="タイトル 1">
             <a:extLst>
               <a:ext uri="{FF2B5EF4-FFF2-40B4-BE49-F238E27FC236}">
-                <a16:creationId xmlns:a16="http://schemas.microsoft.com/office/drawing/2014/main" id="{1BF57F68-DBF9-F1C6-49FD-FCEC17E2F413}"/>
+                <a16:creationId xmlns:a16="http://schemas.microsoft.com/office/drawing/2014/main" id="{52FC29DE-2C6B-A8BD-88DF-A0C12D6060EA}"/>
               </a:ext>
             </a:extLst>
           </p:cNvPr>
@@ -382,7 +382,7 @@
           <p:cNvPr id="3" name="縦書きテキスト プレースホルダー 2">
             <a:extLst>
               <a:ext uri="{FF2B5EF4-FFF2-40B4-BE49-F238E27FC236}">
-                <a16:creationId xmlns:a16="http://schemas.microsoft.com/office/drawing/2014/main" id="{3A707334-CA69-5D76-5E2B-5B3B6AB7D6DA}"/>
+                <a16:creationId xmlns:a16="http://schemas.microsoft.com/office/drawing/2014/main" id="{E25CC2A3-8843-C722-43CB-3C5533B5CB43}"/>
               </a:ext>
             </a:extLst>
           </p:cNvPr>
@@ -471,7 +471,7 @@
           <p:cNvPr id="4" name="日付プレースホルダー 3">
             <a:extLst>
               <a:ext uri="{FF2B5EF4-FFF2-40B4-BE49-F238E27FC236}">
-                <a16:creationId xmlns:a16="http://schemas.microsoft.com/office/drawing/2014/main" id="{02323702-DE4D-E702-C864-D808D8227FFE}"/>
+                <a16:creationId xmlns:a16="http://schemas.microsoft.com/office/drawing/2014/main" id="{1678FDD4-3A43-D29F-40CA-320E1161B907}"/>
               </a:ext>
             </a:extLst>
           </p:cNvPr>
@@ -487,7 +487,7 @@
           <a:bodyPr/>
           <a:lstStyle/>
           <a:p>
-            <a:fld id="{98DE8F79-B99D-4E54-A19E-CB4CEA7E403A}" type="datetimeFigureOut">
+            <a:fld id="{DF6CADF0-1665-4BC8-B3C5-0BBB871F1254}" type="datetimeFigureOut">
               <a:rPr kumimoji="1" lang="ja-JP" altLang="en-US" smtClean="0"/>
               <a:t>2026/7/30</a:t>
             </a:fld>
@@ -500,7 +500,7 @@
           <p:cNvPr id="5" name="フッター プレースホルダー 4">
             <a:extLst>
               <a:ext uri="{FF2B5EF4-FFF2-40B4-BE49-F238E27FC236}">
-                <a16:creationId xmlns:a16="http://schemas.microsoft.com/office/drawing/2014/main" id="{A09214E6-E876-61C8-1BC1-39A0CFBC4E67}"/>
+                <a16:creationId xmlns:a16="http://schemas.microsoft.com/office/drawing/2014/main" id="{5E40E31B-19A9-5C67-D129-78C0D8072565}"/>
               </a:ext>
             </a:extLst>
           </p:cNvPr>
@@ -525,7 +525,7 @@
           <p:cNvPr id="6" name="スライド番号プレースホルダー 5">
             <a:extLst>
               <a:ext uri="{FF2B5EF4-FFF2-40B4-BE49-F238E27FC236}">
-                <a16:creationId xmlns:a16="http://schemas.microsoft.com/office/drawing/2014/main" id="{7043E4DC-DD8D-DFA2-DA73-278370CFCDE6}"/>
+                <a16:creationId xmlns:a16="http://schemas.microsoft.com/office/drawing/2014/main" id="{41F01E48-FEEA-44B9-5DFB-9E438BFD4341}"/>
               </a:ext>
             </a:extLst>
           </p:cNvPr>
@@ -541,7 +541,7 @@
           <a:bodyPr/>
           <a:lstStyle/>
           <a:p>
-            <a:fld id="{8006A63A-9CAB-4E2F-8172-2D3D695CD31B}" type="slidenum">
+            <a:fld id="{537599D8-0CB8-4E5D-BC9F-0F9D371EE2FC}" type="slidenum">
               <a:rPr kumimoji="1" lang="ja-JP" altLang="en-US" smtClean="0"/>
               <a:t>‹#›</a:t>
             </a:fld>
@@ -552,7 +552,7 @@
     </p:spTree>
     <p:extLst>
       <p:ext uri="{BB962C8B-B14F-4D97-AF65-F5344CB8AC3E}">
-        <p14:creationId xmlns:p14="http://schemas.microsoft.com/office/powerpoint/2010/main" val="3808842321"/>
+        <p14:creationId xmlns:p14="http://schemas.microsoft.com/office/powerpoint/2010/main" val="1032581006"/>
       </p:ext>
     </p:extLst>
   </p:cSld>
@@ -584,7 +584,7 @@
           <p:cNvPr id="2" name="縦書きタイトル 1">
             <a:extLst>
               <a:ext uri="{FF2B5EF4-FFF2-40B4-BE49-F238E27FC236}">
-                <a16:creationId xmlns:a16="http://schemas.microsoft.com/office/drawing/2014/main" id="{CC22B34E-B620-DA68-E569-9FE6CFF07ED5}"/>
+                <a16:creationId xmlns:a16="http://schemas.microsoft.com/office/drawing/2014/main" id="{929E3321-6195-424D-209C-A924FC6D711C}"/>
               </a:ext>
             </a:extLst>
           </p:cNvPr>
@@ -617,7 +617,7 @@
           <p:cNvPr id="3" name="縦書きテキスト プレースホルダー 2">
             <a:extLst>
               <a:ext uri="{FF2B5EF4-FFF2-40B4-BE49-F238E27FC236}">
-                <a16:creationId xmlns:a16="http://schemas.microsoft.com/office/drawing/2014/main" id="{857456DC-9397-A27B-B296-A5C78DC85A16}"/>
+                <a16:creationId xmlns:a16="http://schemas.microsoft.com/office/drawing/2014/main" id="{140DA2CF-7801-BA8F-65DD-8AF5121A0A1F}"/>
               </a:ext>
             </a:extLst>
           </p:cNvPr>
@@ -711,7 +711,7 @@
           <p:cNvPr id="4" name="日付プレースホルダー 3">
             <a:extLst>
               <a:ext uri="{FF2B5EF4-FFF2-40B4-BE49-F238E27FC236}">
-                <a16:creationId xmlns:a16="http://schemas.microsoft.com/office/drawing/2014/main" id="{7AE631D3-8456-9595-E4FD-FC019E4EC509}"/>
+                <a16:creationId xmlns:a16="http://schemas.microsoft.com/office/drawing/2014/main" id="{5B3013D3-C061-BFE9-C69C-AA81FD9D3CBC}"/>
               </a:ext>
             </a:extLst>
           </p:cNvPr>
@@ -727,7 +727,7 @@
           <a:bodyPr/>
           <a:lstStyle/>
           <a:p>
-            <a:fld id="{98DE8F79-B99D-4E54-A19E-CB4CEA7E403A}" type="datetimeFigureOut">
+            <a:fld id="{DF6CADF0-1665-4BC8-B3C5-0BBB871F1254}" type="datetimeFigureOut">
               <a:rPr kumimoji="1" lang="ja-JP" altLang="en-US" smtClean="0"/>
               <a:t>2026/7/30</a:t>
             </a:fld>
@@ -740,7 +740,7 @@
           <p:cNvPr id="5" name="フッター プレースホルダー 4">
             <a:extLst>
               <a:ext uri="{FF2B5EF4-FFF2-40B4-BE49-F238E27FC236}">
-                <a16:creationId xmlns:a16="http://schemas.microsoft.com/office/drawing/2014/main" id="{E8F6EF7A-0CB7-3CEE-FE9D-B796CF82F407}"/>
+                <a16:creationId xmlns:a16="http://schemas.microsoft.com/office/drawing/2014/main" id="{A4ACA5E1-E11E-8DE9-BEC2-C2C3650F97AC}"/>
               </a:ext>
             </a:extLst>
           </p:cNvPr>
@@ -765,7 +765,7 @@
           <p:cNvPr id="6" name="スライド番号プレースホルダー 5">
             <a:extLst>
               <a:ext uri="{FF2B5EF4-FFF2-40B4-BE49-F238E27FC236}">
-                <a16:creationId xmlns:a16="http://schemas.microsoft.com/office/drawing/2014/main" id="{E95F9770-F373-64AB-DA61-7DB7A6C570A7}"/>
+                <a16:creationId xmlns:a16="http://schemas.microsoft.com/office/drawing/2014/main" id="{CB2E02CD-F13C-036B-AC7F-770384B29648}"/>
               </a:ext>
             </a:extLst>
           </p:cNvPr>
@@ -781,7 +781,7 @@
           <a:bodyPr/>
           <a:lstStyle/>
           <a:p>
-            <a:fld id="{8006A63A-9CAB-4E2F-8172-2D3D695CD31B}" type="slidenum">
+            <a:fld id="{537599D8-0CB8-4E5D-BC9F-0F9D371EE2FC}" type="slidenum">
               <a:rPr kumimoji="1" lang="ja-JP" altLang="en-US" smtClean="0"/>
               <a:t>‹#›</a:t>
             </a:fld>
@@ -792,7 +792,7 @@
     </p:spTree>
     <p:extLst>
       <p:ext uri="{BB962C8B-B14F-4D97-AF65-F5344CB8AC3E}">
-        <p14:creationId xmlns:p14="http://schemas.microsoft.com/office/powerpoint/2010/main" val="3695436502"/>
+        <p14:creationId xmlns:p14="http://schemas.microsoft.com/office/powerpoint/2010/main" val="3446423488"/>
       </p:ext>
     </p:extLst>
   </p:cSld>
@@ -824,7 +824,7 @@
           <p:cNvPr id="2" name="タイトル 1">
             <a:extLst>
               <a:ext uri="{FF2B5EF4-FFF2-40B4-BE49-F238E27FC236}">
-                <a16:creationId xmlns:a16="http://schemas.microsoft.com/office/drawing/2014/main" id="{CDDAB952-2DDD-564F-5221-66740D4DFB78}"/>
+                <a16:creationId xmlns:a16="http://schemas.microsoft.com/office/drawing/2014/main" id="{8635CE2A-B6AC-E8B9-38FF-B38006770182}"/>
               </a:ext>
             </a:extLst>
           </p:cNvPr>
@@ -852,7 +852,7 @@
           <p:cNvPr id="3" name="コンテンツ プレースホルダー 2">
             <a:extLst>
               <a:ext uri="{FF2B5EF4-FFF2-40B4-BE49-F238E27FC236}">
-                <a16:creationId xmlns:a16="http://schemas.microsoft.com/office/drawing/2014/main" id="{00BC9496-C964-E594-FAEC-71CE42D73359}"/>
+                <a16:creationId xmlns:a16="http://schemas.microsoft.com/office/drawing/2014/main" id="{96F920EC-7459-5B6C-BFDD-99DCB3A9720D}"/>
               </a:ext>
             </a:extLst>
           </p:cNvPr>
@@ -941,7 +941,7 @@
           <p:cNvPr id="4" name="日付プレースホルダー 3">
             <a:extLst>
               <a:ext uri="{FF2B5EF4-FFF2-40B4-BE49-F238E27FC236}">
-                <a16:creationId xmlns:a16="http://schemas.microsoft.com/office/drawing/2014/main" id="{B430823A-B36E-CDA4-11AA-9597C6A42AD3}"/>
+                <a16:creationId xmlns:a16="http://schemas.microsoft.com/office/drawing/2014/main" id="{3A3CD3A7-BAB8-BA69-2E35-FAA0D5E542E0}"/>
               </a:ext>
             </a:extLst>
           </p:cNvPr>
@@ -957,7 +957,7 @@
           <a:bodyPr/>
           <a:lstStyle/>
           <a:p>
-            <a:fld id="{98DE8F79-B99D-4E54-A19E-CB4CEA7E403A}" type="datetimeFigureOut">
+            <a:fld id="{DF6CADF0-1665-4BC8-B3C5-0BBB871F1254}" type="datetimeFigureOut">
               <a:rPr kumimoji="1" lang="ja-JP" altLang="en-US" smtClean="0"/>
               <a:t>2026/7/30</a:t>
             </a:fld>
@@ -970,7 +970,7 @@
           <p:cNvPr id="5" name="フッター プレースホルダー 4">
             <a:extLst>
               <a:ext uri="{FF2B5EF4-FFF2-40B4-BE49-F238E27FC236}">
-                <a16:creationId xmlns:a16="http://schemas.microsoft.com/office/drawing/2014/main" id="{562D8322-389C-9D4C-0BF3-9AAB8846CFBF}"/>
+                <a16:creationId xmlns:a16="http://schemas.microsoft.com/office/drawing/2014/main" id="{53E83038-76A8-C2C0-5CED-9C4054F4DEFC}"/>
               </a:ext>
             </a:extLst>
           </p:cNvPr>
@@ -995,7 +995,7 @@
           <p:cNvPr id="6" name="スライド番号プレースホルダー 5">
             <a:extLst>
               <a:ext uri="{FF2B5EF4-FFF2-40B4-BE49-F238E27FC236}">
-                <a16:creationId xmlns:a16="http://schemas.microsoft.com/office/drawing/2014/main" id="{3AC08163-F1A9-C183-EEE9-D41AA866B33C}"/>
+                <a16:creationId xmlns:a16="http://schemas.microsoft.com/office/drawing/2014/main" id="{A6119BE9-962B-2FF7-8BD9-F601BF564E92}"/>
               </a:ext>
             </a:extLst>
           </p:cNvPr>
@@ -1011,7 +1011,7 @@
           <a:bodyPr/>
           <a:lstStyle/>
           <a:p>
-            <a:fld id="{8006A63A-9CAB-4E2F-8172-2D3D695CD31B}" type="slidenum">
+            <a:fld id="{537599D8-0CB8-4E5D-BC9F-0F9D371EE2FC}" type="slidenum">
               <a:rPr kumimoji="1" lang="ja-JP" altLang="en-US" smtClean="0"/>
               <a:t>‹#›</a:t>
             </a:fld>
@@ -1022,7 +1022,7 @@
     </p:spTree>
     <p:extLst>
       <p:ext uri="{BB962C8B-B14F-4D97-AF65-F5344CB8AC3E}">
-        <p14:creationId xmlns:p14="http://schemas.microsoft.com/office/powerpoint/2010/main" val="572844977"/>
+        <p14:creationId xmlns:p14="http://schemas.microsoft.com/office/powerpoint/2010/main" val="1941021781"/>
       </p:ext>
     </p:extLst>
   </p:cSld>
@@ -1054,7 +1054,7 @@
           <p:cNvPr id="2" name="タイトル 1">
             <a:extLst>
               <a:ext uri="{FF2B5EF4-FFF2-40B4-BE49-F238E27FC236}">
-                <a16:creationId xmlns:a16="http://schemas.microsoft.com/office/drawing/2014/main" id="{BFC7C0B7-C64A-7459-A388-C3F3700FBF85}"/>
+                <a16:creationId xmlns:a16="http://schemas.microsoft.com/office/drawing/2014/main" id="{8B5A32AB-D8C4-303A-D44C-CCD8F7FD8981}"/>
               </a:ext>
             </a:extLst>
           </p:cNvPr>
@@ -1091,7 +1091,7 @@
           <p:cNvPr id="3" name="テキスト プレースホルダー 2">
             <a:extLst>
               <a:ext uri="{FF2B5EF4-FFF2-40B4-BE49-F238E27FC236}">
-                <a16:creationId xmlns:a16="http://schemas.microsoft.com/office/drawing/2014/main" id="{4F0E7B8F-E012-E8E7-E0B2-EC34C4EAEABF}"/>
+                <a16:creationId xmlns:a16="http://schemas.microsoft.com/office/drawing/2014/main" id="{0D735234-9B38-A17E-B2B1-8BF3AA956400}"/>
               </a:ext>
             </a:extLst>
           </p:cNvPr>
@@ -1216,7 +1216,7 @@
           <p:cNvPr id="4" name="日付プレースホルダー 3">
             <a:extLst>
               <a:ext uri="{FF2B5EF4-FFF2-40B4-BE49-F238E27FC236}">
-                <a16:creationId xmlns:a16="http://schemas.microsoft.com/office/drawing/2014/main" id="{56A0603E-F4E7-149E-ADA4-4D6DEE0CDAC0}"/>
+                <a16:creationId xmlns:a16="http://schemas.microsoft.com/office/drawing/2014/main" id="{930C1459-4F02-3EB5-F8AC-89947547895C}"/>
               </a:ext>
             </a:extLst>
           </p:cNvPr>
@@ -1232,7 +1232,7 @@
           <a:bodyPr/>
           <a:lstStyle/>
           <a:p>
-            <a:fld id="{98DE8F79-B99D-4E54-A19E-CB4CEA7E403A}" type="datetimeFigureOut">
+            <a:fld id="{DF6CADF0-1665-4BC8-B3C5-0BBB871F1254}" type="datetimeFigureOut">
               <a:rPr kumimoji="1" lang="ja-JP" altLang="en-US" smtClean="0"/>
               <a:t>2026/7/30</a:t>
             </a:fld>
@@ -1245,7 +1245,7 @@
           <p:cNvPr id="5" name="フッター プレースホルダー 4">
             <a:extLst>
               <a:ext uri="{FF2B5EF4-FFF2-40B4-BE49-F238E27FC236}">
-                <a16:creationId xmlns:a16="http://schemas.microsoft.com/office/drawing/2014/main" id="{F959DA0F-5E70-C641-AD12-AA64A2CFC939}"/>
+                <a16:creationId xmlns:a16="http://schemas.microsoft.com/office/drawing/2014/main" id="{95787E84-DDA6-BB0C-B453-A3DA5EA062F0}"/>
               </a:ext>
             </a:extLst>
           </p:cNvPr>
@@ -1270,7 +1270,7 @@
           <p:cNvPr id="6" name="スライド番号プレースホルダー 5">
             <a:extLst>
               <a:ext uri="{FF2B5EF4-FFF2-40B4-BE49-F238E27FC236}">
-                <a16:creationId xmlns:a16="http://schemas.microsoft.com/office/drawing/2014/main" id="{3CF71922-B524-2386-F4FD-41264C7A7C3C}"/>
+                <a16:creationId xmlns:a16="http://schemas.microsoft.com/office/drawing/2014/main" id="{E7D72EB6-66D4-D973-1FFE-C2F0A99D3B7D}"/>
               </a:ext>
             </a:extLst>
           </p:cNvPr>
@@ -1286,7 +1286,7 @@
           <a:bodyPr/>
           <a:lstStyle/>
           <a:p>
-            <a:fld id="{8006A63A-9CAB-4E2F-8172-2D3D695CD31B}" type="slidenum">
+            <a:fld id="{537599D8-0CB8-4E5D-BC9F-0F9D371EE2FC}" type="slidenum">
               <a:rPr kumimoji="1" lang="ja-JP" altLang="en-US" smtClean="0"/>
               <a:t>‹#›</a:t>
             </a:fld>
@@ -1297,7 +1297,7 @@
     </p:spTree>
     <p:extLst>
       <p:ext uri="{BB962C8B-B14F-4D97-AF65-F5344CB8AC3E}">
-        <p14:creationId xmlns:p14="http://schemas.microsoft.com/office/powerpoint/2010/main" val="211268672"/>
+        <p14:creationId xmlns:p14="http://schemas.microsoft.com/office/powerpoint/2010/main" val="850230417"/>
       </p:ext>
     </p:extLst>
   </p:cSld>
@@ -1329,7 +1329,7 @@
           <p:cNvPr id="2" name="タイトル 1">
             <a:extLst>
               <a:ext uri="{FF2B5EF4-FFF2-40B4-BE49-F238E27FC236}">
-                <a16:creationId xmlns:a16="http://schemas.microsoft.com/office/drawing/2014/main" id="{875D9BF6-EEA0-4130-D449-59ADE223EDA4}"/>
+                <a16:creationId xmlns:a16="http://schemas.microsoft.com/office/drawing/2014/main" id="{B7CA7AB1-6766-6678-98AD-720459085AAA}"/>
               </a:ext>
             </a:extLst>
           </p:cNvPr>
@@ -1357,7 +1357,7 @@
           <p:cNvPr id="3" name="コンテンツ プレースホルダー 2">
             <a:extLst>
               <a:ext uri="{FF2B5EF4-FFF2-40B4-BE49-F238E27FC236}">
-                <a16:creationId xmlns:a16="http://schemas.microsoft.com/office/drawing/2014/main" id="{282E0FBD-0CD7-750D-49C4-A105EFDCB7CE}"/>
+                <a16:creationId xmlns:a16="http://schemas.microsoft.com/office/drawing/2014/main" id="{C070C7B5-EFD8-5086-4A67-0EB0B65E3FC1}"/>
               </a:ext>
             </a:extLst>
           </p:cNvPr>
@@ -1451,7 +1451,7 @@
           <p:cNvPr id="4" name="コンテンツ プレースホルダー 3">
             <a:extLst>
               <a:ext uri="{FF2B5EF4-FFF2-40B4-BE49-F238E27FC236}">
-                <a16:creationId xmlns:a16="http://schemas.microsoft.com/office/drawing/2014/main" id="{7E00650A-5295-5BD8-15BA-2BD227A0B88E}"/>
+                <a16:creationId xmlns:a16="http://schemas.microsoft.com/office/drawing/2014/main" id="{2471C3CA-7283-CBE9-96F1-1B2196AB5DE9}"/>
               </a:ext>
             </a:extLst>
           </p:cNvPr>
@@ -1545,7 +1545,7 @@
           <p:cNvPr id="5" name="日付プレースホルダー 4">
             <a:extLst>
               <a:ext uri="{FF2B5EF4-FFF2-40B4-BE49-F238E27FC236}">
-                <a16:creationId xmlns:a16="http://schemas.microsoft.com/office/drawing/2014/main" id="{631876F7-62D5-1237-6651-D7FE62D578D3}"/>
+                <a16:creationId xmlns:a16="http://schemas.microsoft.com/office/drawing/2014/main" id="{9942D9D7-5EBD-9A31-3B68-922B95865850}"/>
               </a:ext>
             </a:extLst>
           </p:cNvPr>
@@ -1561,7 +1561,7 @@
           <a:bodyPr/>
           <a:lstStyle/>
           <a:p>
-            <a:fld id="{98DE8F79-B99D-4E54-A19E-CB4CEA7E403A}" type="datetimeFigureOut">
+            <a:fld id="{DF6CADF0-1665-4BC8-B3C5-0BBB871F1254}" type="datetimeFigureOut">
               <a:rPr kumimoji="1" lang="ja-JP" altLang="en-US" smtClean="0"/>
               <a:t>2026/7/30</a:t>
             </a:fld>
@@ -1574,7 +1574,7 @@
           <p:cNvPr id="6" name="フッター プレースホルダー 5">
             <a:extLst>
               <a:ext uri="{FF2B5EF4-FFF2-40B4-BE49-F238E27FC236}">
-                <a16:creationId xmlns:a16="http://schemas.microsoft.com/office/drawing/2014/main" id="{BF4B9DD9-28ED-B2C0-3DBC-1CB9B248E061}"/>
+                <a16:creationId xmlns:a16="http://schemas.microsoft.com/office/drawing/2014/main" id="{131E3C54-51EC-742A-FDFB-EE38A6C6CC5E}"/>
               </a:ext>
             </a:extLst>
           </p:cNvPr>
@@ -1599,7 +1599,7 @@
           <p:cNvPr id="7" name="スライド番号プレースホルダー 6">
             <a:extLst>
               <a:ext uri="{FF2B5EF4-FFF2-40B4-BE49-F238E27FC236}">
-                <a16:creationId xmlns:a16="http://schemas.microsoft.com/office/drawing/2014/main" id="{387569E2-138B-8CA0-7B3C-1BDF8854E359}"/>
+                <a16:creationId xmlns:a16="http://schemas.microsoft.com/office/drawing/2014/main" id="{B757134F-022C-25A2-6FE1-9229A60F0A06}"/>
               </a:ext>
             </a:extLst>
           </p:cNvPr>
@@ -1615,7 +1615,7 @@
           <a:bodyPr/>
           <a:lstStyle/>
           <a:p>
-            <a:fld id="{8006A63A-9CAB-4E2F-8172-2D3D695CD31B}" type="slidenum">
+            <a:fld id="{537599D8-0CB8-4E5D-BC9F-0F9D371EE2FC}" type="slidenum">
               <a:rPr kumimoji="1" lang="ja-JP" altLang="en-US" smtClean="0"/>
               <a:t>‹#›</a:t>
             </a:fld>
@@ -1626,7 +1626,7 @@
     </p:spTree>
     <p:extLst>
       <p:ext uri="{BB962C8B-B14F-4D97-AF65-F5344CB8AC3E}">
-        <p14:creationId xmlns:p14="http://schemas.microsoft.com/office/powerpoint/2010/main" val="4004993043"/>
+        <p14:creationId xmlns:p14="http://schemas.microsoft.com/office/powerpoint/2010/main" val="2377698376"/>
       </p:ext>
     </p:extLst>
   </p:cSld>
@@ -1658,7 +1658,7 @@
           <p:cNvPr id="2" name="タイトル 1">
             <a:extLst>
               <a:ext uri="{FF2B5EF4-FFF2-40B4-BE49-F238E27FC236}">
-                <a16:creationId xmlns:a16="http://schemas.microsoft.com/office/drawing/2014/main" id="{EC3389D5-FEB6-A5BE-B0FF-5EEFA2444236}"/>
+                <a16:creationId xmlns:a16="http://schemas.microsoft.com/office/drawing/2014/main" id="{2C9E5D46-CDC3-04E0-C6E3-873338E1A934}"/>
               </a:ext>
             </a:extLst>
           </p:cNvPr>
@@ -1691,7 +1691,7 @@
           <p:cNvPr id="3" name="テキスト プレースホルダー 2">
             <a:extLst>
               <a:ext uri="{FF2B5EF4-FFF2-40B4-BE49-F238E27FC236}">
-                <a16:creationId xmlns:a16="http://schemas.microsoft.com/office/drawing/2014/main" id="{404ABF3B-E31B-B2E4-4501-E1DD0C89F571}"/>
+                <a16:creationId xmlns:a16="http://schemas.microsoft.com/office/drawing/2014/main" id="{895E2E0E-09D6-E0ED-C785-376619D51E31}"/>
               </a:ext>
             </a:extLst>
           </p:cNvPr>
@@ -1762,7 +1762,7 @@
           <p:cNvPr id="4" name="コンテンツ プレースホルダー 3">
             <a:extLst>
               <a:ext uri="{FF2B5EF4-FFF2-40B4-BE49-F238E27FC236}">
-                <a16:creationId xmlns:a16="http://schemas.microsoft.com/office/drawing/2014/main" id="{2DC8CB86-40F3-C327-2EF5-557D93CBF2E6}"/>
+                <a16:creationId xmlns:a16="http://schemas.microsoft.com/office/drawing/2014/main" id="{13C6C41C-E915-B947-70D3-C32D111ED072}"/>
               </a:ext>
             </a:extLst>
           </p:cNvPr>
@@ -1856,7 +1856,7 @@
           <p:cNvPr id="5" name="テキスト プレースホルダー 4">
             <a:extLst>
               <a:ext uri="{FF2B5EF4-FFF2-40B4-BE49-F238E27FC236}">
-                <a16:creationId xmlns:a16="http://schemas.microsoft.com/office/drawing/2014/main" id="{017D7A16-28D9-182B-6C4C-2DC4765E9E55}"/>
+                <a16:creationId xmlns:a16="http://schemas.microsoft.com/office/drawing/2014/main" id="{9AB3CD5B-0936-8DA6-F16E-ADADD01941F7}"/>
               </a:ext>
             </a:extLst>
           </p:cNvPr>
@@ -1927,7 +1927,7 @@
           <p:cNvPr id="6" name="コンテンツ プレースホルダー 5">
             <a:extLst>
               <a:ext uri="{FF2B5EF4-FFF2-40B4-BE49-F238E27FC236}">
-                <a16:creationId xmlns:a16="http://schemas.microsoft.com/office/drawing/2014/main" id="{563FB645-291C-5489-0BDC-9AF066A66B9E}"/>
+                <a16:creationId xmlns:a16="http://schemas.microsoft.com/office/drawing/2014/main" id="{8D8FEB19-6129-DF84-43A3-2F9E2BE366A2}"/>
               </a:ext>
             </a:extLst>
           </p:cNvPr>
@@ -2021,7 +2021,7 @@
           <p:cNvPr id="7" name="日付プレースホルダー 6">
             <a:extLst>
               <a:ext uri="{FF2B5EF4-FFF2-40B4-BE49-F238E27FC236}">
-                <a16:creationId xmlns:a16="http://schemas.microsoft.com/office/drawing/2014/main" id="{0DB6D6F0-DF1E-5327-7700-9C704533F920}"/>
+                <a16:creationId xmlns:a16="http://schemas.microsoft.com/office/drawing/2014/main" id="{40002289-A9A2-237C-281A-26A6506586B0}"/>
               </a:ext>
             </a:extLst>
           </p:cNvPr>
@@ -2037,7 +2037,7 @@
           <a:bodyPr/>
           <a:lstStyle/>
           <a:p>
-            <a:fld id="{98DE8F79-B99D-4E54-A19E-CB4CEA7E403A}" type="datetimeFigureOut">
+            <a:fld id="{DF6CADF0-1665-4BC8-B3C5-0BBB871F1254}" type="datetimeFigureOut">
               <a:rPr kumimoji="1" lang="ja-JP" altLang="en-US" smtClean="0"/>
               <a:t>2026/7/30</a:t>
             </a:fld>
@@ -2050,7 +2050,7 @@
           <p:cNvPr id="8" name="フッター プレースホルダー 7">
             <a:extLst>
               <a:ext uri="{FF2B5EF4-FFF2-40B4-BE49-F238E27FC236}">
-                <a16:creationId xmlns:a16="http://schemas.microsoft.com/office/drawing/2014/main" id="{4665E70A-B08A-C8A6-7925-9BBF15EAC3CB}"/>
+                <a16:creationId xmlns:a16="http://schemas.microsoft.com/office/drawing/2014/main" id="{5710ECCD-EE5D-B96E-8387-A2E36435E50E}"/>
               </a:ext>
             </a:extLst>
           </p:cNvPr>
@@ -2075,7 +2075,7 @@
           <p:cNvPr id="9" name="スライド番号プレースホルダー 8">
             <a:extLst>
               <a:ext uri="{FF2B5EF4-FFF2-40B4-BE49-F238E27FC236}">
-                <a16:creationId xmlns:a16="http://schemas.microsoft.com/office/drawing/2014/main" id="{09CBE446-CBEB-1E99-479E-B97C9697F393}"/>
+                <a16:creationId xmlns:a16="http://schemas.microsoft.com/office/drawing/2014/main" id="{4F5498F6-89A0-07AE-F497-DBAFEC108289}"/>
               </a:ext>
             </a:extLst>
           </p:cNvPr>
@@ -2091,7 +2091,7 @@
           <a:bodyPr/>
           <a:lstStyle/>
           <a:p>
-            <a:fld id="{8006A63A-9CAB-4E2F-8172-2D3D695CD31B}" type="slidenum">
+            <a:fld id="{537599D8-0CB8-4E5D-BC9F-0F9D371EE2FC}" type="slidenum">
               <a:rPr kumimoji="1" lang="ja-JP" altLang="en-US" smtClean="0"/>
               <a:t>‹#›</a:t>
             </a:fld>
@@ -2102,7 +2102,7 @@
     </p:spTree>
     <p:extLst>
       <p:ext uri="{BB962C8B-B14F-4D97-AF65-F5344CB8AC3E}">
-        <p14:creationId xmlns:p14="http://schemas.microsoft.com/office/powerpoint/2010/main" val="3114670646"/>
+        <p14:creationId xmlns:p14="http://schemas.microsoft.com/office/powerpoint/2010/main" val="382559058"/>
       </p:ext>
     </p:extLst>
   </p:cSld>
@@ -2134,7 +2134,7 @@
           <p:cNvPr id="2" name="タイトル 1">
             <a:extLst>
               <a:ext uri="{FF2B5EF4-FFF2-40B4-BE49-F238E27FC236}">
-                <a16:creationId xmlns:a16="http://schemas.microsoft.com/office/drawing/2014/main" id="{80045C2F-78C8-B213-5D64-D88CF7CAA0E1}"/>
+                <a16:creationId xmlns:a16="http://schemas.microsoft.com/office/drawing/2014/main" id="{14326128-0534-4A1C-6938-FF1812B524F0}"/>
               </a:ext>
             </a:extLst>
           </p:cNvPr>
@@ -2162,7 +2162,7 @@
           <p:cNvPr id="3" name="日付プレースホルダー 2">
             <a:extLst>
               <a:ext uri="{FF2B5EF4-FFF2-40B4-BE49-F238E27FC236}">
-                <a16:creationId xmlns:a16="http://schemas.microsoft.com/office/drawing/2014/main" id="{664D24ED-F3C2-F196-667F-0F684F9DD99A}"/>
+                <a16:creationId xmlns:a16="http://schemas.microsoft.com/office/drawing/2014/main" id="{615608CD-7961-0D6F-451E-E889D49BAF4B}"/>
               </a:ext>
             </a:extLst>
           </p:cNvPr>
@@ -2178,7 +2178,7 @@
           <a:bodyPr/>
           <a:lstStyle/>
           <a:p>
-            <a:fld id="{98DE8F79-B99D-4E54-A19E-CB4CEA7E403A}" type="datetimeFigureOut">
+            <a:fld id="{DF6CADF0-1665-4BC8-B3C5-0BBB871F1254}" type="datetimeFigureOut">
               <a:rPr kumimoji="1" lang="ja-JP" altLang="en-US" smtClean="0"/>
               <a:t>2026/7/30</a:t>
             </a:fld>
@@ -2191,7 +2191,7 @@
           <p:cNvPr id="4" name="フッター プレースホルダー 3">
             <a:extLst>
               <a:ext uri="{FF2B5EF4-FFF2-40B4-BE49-F238E27FC236}">
-                <a16:creationId xmlns:a16="http://schemas.microsoft.com/office/drawing/2014/main" id="{6478230D-F1C7-45F7-1A1C-DB5EDF5C156C}"/>
+                <a16:creationId xmlns:a16="http://schemas.microsoft.com/office/drawing/2014/main" id="{030C743A-DD82-A675-23D3-46DB7B9C632E}"/>
               </a:ext>
             </a:extLst>
           </p:cNvPr>
@@ -2216,7 +2216,7 @@
           <p:cNvPr id="5" name="スライド番号プレースホルダー 4">
             <a:extLst>
               <a:ext uri="{FF2B5EF4-FFF2-40B4-BE49-F238E27FC236}">
-                <a16:creationId xmlns:a16="http://schemas.microsoft.com/office/drawing/2014/main" id="{14525598-5C96-2FA9-18ED-B4767F507DF4}"/>
+                <a16:creationId xmlns:a16="http://schemas.microsoft.com/office/drawing/2014/main" id="{8A164D7C-7FB0-6B7A-6B42-6F9DE5DEA4C0}"/>
               </a:ext>
             </a:extLst>
           </p:cNvPr>
@@ -2232,7 +2232,7 @@
           <a:bodyPr/>
           <a:lstStyle/>
           <a:p>
-            <a:fld id="{8006A63A-9CAB-4E2F-8172-2D3D695CD31B}" type="slidenum">
+            <a:fld id="{537599D8-0CB8-4E5D-BC9F-0F9D371EE2FC}" type="slidenum">
               <a:rPr kumimoji="1" lang="ja-JP" altLang="en-US" smtClean="0"/>
               <a:t>‹#›</a:t>
             </a:fld>
@@ -2243,7 +2243,7 @@
     </p:spTree>
     <p:extLst>
       <p:ext uri="{BB962C8B-B14F-4D97-AF65-F5344CB8AC3E}">
-        <p14:creationId xmlns:p14="http://schemas.microsoft.com/office/powerpoint/2010/main" val="1480747186"/>
+        <p14:creationId xmlns:p14="http://schemas.microsoft.com/office/powerpoint/2010/main" val="2426194816"/>
       </p:ext>
     </p:extLst>
   </p:cSld>
@@ -2275,7 +2275,7 @@
           <p:cNvPr id="2" name="日付プレースホルダー 1">
             <a:extLst>
               <a:ext uri="{FF2B5EF4-FFF2-40B4-BE49-F238E27FC236}">
-                <a16:creationId xmlns:a16="http://schemas.microsoft.com/office/drawing/2014/main" id="{F258D5B5-46BF-03AA-F71E-78299F6D36AE}"/>
+                <a16:creationId xmlns:a16="http://schemas.microsoft.com/office/drawing/2014/main" id="{3FE6ECE2-0D44-F30F-F1E3-28CE6E62CE24}"/>
               </a:ext>
             </a:extLst>
           </p:cNvPr>
@@ -2291,7 +2291,7 @@
           <a:bodyPr/>
           <a:lstStyle/>
           <a:p>
-            <a:fld id="{98DE8F79-B99D-4E54-A19E-CB4CEA7E403A}" type="datetimeFigureOut">
+            <a:fld id="{DF6CADF0-1665-4BC8-B3C5-0BBB871F1254}" type="datetimeFigureOut">
               <a:rPr kumimoji="1" lang="ja-JP" altLang="en-US" smtClean="0"/>
               <a:t>2026/7/30</a:t>
             </a:fld>
@@ -2304,7 +2304,7 @@
           <p:cNvPr id="3" name="フッター プレースホルダー 2">
             <a:extLst>
               <a:ext uri="{FF2B5EF4-FFF2-40B4-BE49-F238E27FC236}">
-                <a16:creationId xmlns:a16="http://schemas.microsoft.com/office/drawing/2014/main" id="{46631402-959E-1B4F-4540-95202654A67C}"/>
+                <a16:creationId xmlns:a16="http://schemas.microsoft.com/office/drawing/2014/main" id="{5B6A3D9C-E2EC-B28B-317B-550C75E13F5D}"/>
               </a:ext>
             </a:extLst>
           </p:cNvPr>
@@ -2329,7 +2329,7 @@
           <p:cNvPr id="4" name="スライド番号プレースホルダー 3">
             <a:extLst>
               <a:ext uri="{FF2B5EF4-FFF2-40B4-BE49-F238E27FC236}">
-                <a16:creationId xmlns:a16="http://schemas.microsoft.com/office/drawing/2014/main" id="{52993382-D4DF-3EF2-0365-C50B421F91CC}"/>
+                <a16:creationId xmlns:a16="http://schemas.microsoft.com/office/drawing/2014/main" id="{FEE6DF7A-ABAC-85F6-7BFB-D3802746D43F}"/>
               </a:ext>
             </a:extLst>
           </p:cNvPr>
@@ -2345,7 +2345,7 @@
           <a:bodyPr/>
           <a:lstStyle/>
           <a:p>
-            <a:fld id="{8006A63A-9CAB-4E2F-8172-2D3D695CD31B}" type="slidenum">
+            <a:fld id="{537599D8-0CB8-4E5D-BC9F-0F9D371EE2FC}" type="slidenum">
               <a:rPr kumimoji="1" lang="ja-JP" altLang="en-US" smtClean="0"/>
               <a:t>‹#›</a:t>
             </a:fld>
@@ -2356,7 +2356,7 @@
     </p:spTree>
     <p:extLst>
       <p:ext uri="{BB962C8B-B14F-4D97-AF65-F5344CB8AC3E}">
-        <p14:creationId xmlns:p14="http://schemas.microsoft.com/office/powerpoint/2010/main" val="2785507813"/>
+        <p14:creationId xmlns:p14="http://schemas.microsoft.com/office/powerpoint/2010/main" val="970699230"/>
       </p:ext>
     </p:extLst>
   </p:cSld>
@@ -2388,7 +2388,7 @@
           <p:cNvPr id="2" name="タイトル 1">
             <a:extLst>
               <a:ext uri="{FF2B5EF4-FFF2-40B4-BE49-F238E27FC236}">
-                <a16:creationId xmlns:a16="http://schemas.microsoft.com/office/drawing/2014/main" id="{CDDACA56-CA37-FB52-312B-39BA1B905F03}"/>
+                <a16:creationId xmlns:a16="http://schemas.microsoft.com/office/drawing/2014/main" id="{048EA8CE-15D4-EFB6-9B2D-499FE2288E9A}"/>
               </a:ext>
             </a:extLst>
           </p:cNvPr>
@@ -2425,7 +2425,7 @@
           <p:cNvPr id="3" name="コンテンツ プレースホルダー 2">
             <a:extLst>
               <a:ext uri="{FF2B5EF4-FFF2-40B4-BE49-F238E27FC236}">
-                <a16:creationId xmlns:a16="http://schemas.microsoft.com/office/drawing/2014/main" id="{3BA9D846-608B-1C17-CE16-C49A9498DA2C}"/>
+                <a16:creationId xmlns:a16="http://schemas.microsoft.com/office/drawing/2014/main" id="{F49E3DD5-0F68-01DC-1447-5C899603D2BD}"/>
               </a:ext>
             </a:extLst>
           </p:cNvPr>
@@ -2547,7 +2547,7 @@
           <p:cNvPr id="4" name="テキスト プレースホルダー 3">
             <a:extLst>
               <a:ext uri="{FF2B5EF4-FFF2-40B4-BE49-F238E27FC236}">
-                <a16:creationId xmlns:a16="http://schemas.microsoft.com/office/drawing/2014/main" id="{069141E7-2E5F-B066-37D1-03537B877BF8}"/>
+                <a16:creationId xmlns:a16="http://schemas.microsoft.com/office/drawing/2014/main" id="{F9FA700A-0A22-0A4D-5045-22A00EFC519B}"/>
               </a:ext>
             </a:extLst>
           </p:cNvPr>
@@ -2618,7 +2618,7 @@
           <p:cNvPr id="5" name="日付プレースホルダー 4">
             <a:extLst>
               <a:ext uri="{FF2B5EF4-FFF2-40B4-BE49-F238E27FC236}">
-                <a16:creationId xmlns:a16="http://schemas.microsoft.com/office/drawing/2014/main" id="{11605F9E-1D71-3620-2A36-F8B4E4871605}"/>
+                <a16:creationId xmlns:a16="http://schemas.microsoft.com/office/drawing/2014/main" id="{100B39B3-4B0B-5DDC-C6F2-C49B51530738}"/>
               </a:ext>
             </a:extLst>
           </p:cNvPr>
@@ -2634,7 +2634,7 @@
           <a:bodyPr/>
           <a:lstStyle/>
           <a:p>
-            <a:fld id="{98DE8F79-B99D-4E54-A19E-CB4CEA7E403A}" type="datetimeFigureOut">
+            <a:fld id="{DF6CADF0-1665-4BC8-B3C5-0BBB871F1254}" type="datetimeFigureOut">
               <a:rPr kumimoji="1" lang="ja-JP" altLang="en-US" smtClean="0"/>
               <a:t>2026/7/30</a:t>
             </a:fld>
@@ -2647,7 +2647,7 @@
           <p:cNvPr id="6" name="フッター プレースホルダー 5">
             <a:extLst>
               <a:ext uri="{FF2B5EF4-FFF2-40B4-BE49-F238E27FC236}">
-                <a16:creationId xmlns:a16="http://schemas.microsoft.com/office/drawing/2014/main" id="{6FE393DF-6494-4338-6B43-42F76C7E366A}"/>
+                <a16:creationId xmlns:a16="http://schemas.microsoft.com/office/drawing/2014/main" id="{6546695C-DDBF-AC92-506F-E4470A3AF82A}"/>
               </a:ext>
             </a:extLst>
           </p:cNvPr>
@@ -2672,7 +2672,7 @@
           <p:cNvPr id="7" name="スライド番号プレースホルダー 6">
             <a:extLst>
               <a:ext uri="{FF2B5EF4-FFF2-40B4-BE49-F238E27FC236}">
-                <a16:creationId xmlns:a16="http://schemas.microsoft.com/office/drawing/2014/main" id="{40430EF6-E83F-0925-3B66-58ECE869096D}"/>
+                <a16:creationId xmlns:a16="http://schemas.microsoft.com/office/drawing/2014/main" id="{DB6B9197-FE07-C6D0-4513-E050D3DFBABC}"/>
               </a:ext>
             </a:extLst>
           </p:cNvPr>
@@ -2688,7 +2688,7 @@
           <a:bodyPr/>
           <a:lstStyle/>
           <a:p>
-            <a:fld id="{8006A63A-9CAB-4E2F-8172-2D3D695CD31B}" type="slidenum">
+            <a:fld id="{537599D8-0CB8-4E5D-BC9F-0F9D371EE2FC}" type="slidenum">
               <a:rPr kumimoji="1" lang="ja-JP" altLang="en-US" smtClean="0"/>
               <a:t>‹#›</a:t>
             </a:fld>
@@ -2699,7 +2699,7 @@
     </p:spTree>
     <p:extLst>
       <p:ext uri="{BB962C8B-B14F-4D97-AF65-F5344CB8AC3E}">
-        <p14:creationId xmlns:p14="http://schemas.microsoft.com/office/powerpoint/2010/main" val="1305420827"/>
+        <p14:creationId xmlns:p14="http://schemas.microsoft.com/office/powerpoint/2010/main" val="3164847037"/>
       </p:ext>
     </p:extLst>
   </p:cSld>
@@ -2731,7 +2731,7 @@
           <p:cNvPr id="2" name="タイトル 1">
             <a:extLst>
               <a:ext uri="{FF2B5EF4-FFF2-40B4-BE49-F238E27FC236}">
-                <a16:creationId xmlns:a16="http://schemas.microsoft.com/office/drawing/2014/main" id="{57E9BE9A-A69A-E34E-3C62-C2F34E9B0BD2}"/>
+                <a16:creationId xmlns:a16="http://schemas.microsoft.com/office/drawing/2014/main" id="{73AEB8FB-99CD-0021-ADB0-E76EFCF6668B}"/>
               </a:ext>
             </a:extLst>
           </p:cNvPr>
@@ -2768,7 +2768,7 @@
           <p:cNvPr id="3" name="図プレースホルダー 2">
             <a:extLst>
               <a:ext uri="{FF2B5EF4-FFF2-40B4-BE49-F238E27FC236}">
-                <a16:creationId xmlns:a16="http://schemas.microsoft.com/office/drawing/2014/main" id="{F76B77D4-C45B-DB67-7B1D-A9074B1D39C8}"/>
+                <a16:creationId xmlns:a16="http://schemas.microsoft.com/office/drawing/2014/main" id="{E5C7B454-B5D5-A5AF-7797-C049FAF11423}"/>
               </a:ext>
             </a:extLst>
           </p:cNvPr>
@@ -2835,7 +2835,7 @@
           <p:cNvPr id="4" name="テキスト プレースホルダー 3">
             <a:extLst>
               <a:ext uri="{FF2B5EF4-FFF2-40B4-BE49-F238E27FC236}">
-                <a16:creationId xmlns:a16="http://schemas.microsoft.com/office/drawing/2014/main" id="{D628C0B2-EB2D-C8D0-F2B7-1F86081BDC3E}"/>
+                <a16:creationId xmlns:a16="http://schemas.microsoft.com/office/drawing/2014/main" id="{87A1C8C0-8180-8CD0-ACAA-154F82E11805}"/>
               </a:ext>
             </a:extLst>
           </p:cNvPr>
@@ -2906,7 +2906,7 @@
           <p:cNvPr id="5" name="日付プレースホルダー 4">
             <a:extLst>
               <a:ext uri="{FF2B5EF4-FFF2-40B4-BE49-F238E27FC236}">
-                <a16:creationId xmlns:a16="http://schemas.microsoft.com/office/drawing/2014/main" id="{D8E08725-DAFA-26A9-D085-D7953622F5F2}"/>
+                <a16:creationId xmlns:a16="http://schemas.microsoft.com/office/drawing/2014/main" id="{9F8951BB-F8A1-3D86-99E5-B4944C8B463F}"/>
               </a:ext>
             </a:extLst>
           </p:cNvPr>
@@ -2922,7 +2922,7 @@
           <a:bodyPr/>
           <a:lstStyle/>
           <a:p>
-            <a:fld id="{98DE8F79-B99D-4E54-A19E-CB4CEA7E403A}" type="datetimeFigureOut">
+            <a:fld id="{DF6CADF0-1665-4BC8-B3C5-0BBB871F1254}" type="datetimeFigureOut">
               <a:rPr kumimoji="1" lang="ja-JP" altLang="en-US" smtClean="0"/>
               <a:t>2026/7/30</a:t>
             </a:fld>
@@ -2935,7 +2935,7 @@
           <p:cNvPr id="6" name="フッター プレースホルダー 5">
             <a:extLst>
               <a:ext uri="{FF2B5EF4-FFF2-40B4-BE49-F238E27FC236}">
-                <a16:creationId xmlns:a16="http://schemas.microsoft.com/office/drawing/2014/main" id="{0EC5E28B-D482-09B3-602A-229DC5750788}"/>
+                <a16:creationId xmlns:a16="http://schemas.microsoft.com/office/drawing/2014/main" id="{9ABCE7AE-F874-0397-BC9D-DDF772501CA7}"/>
               </a:ext>
             </a:extLst>
           </p:cNvPr>
@@ -2960,7 +2960,7 @@
           <p:cNvPr id="7" name="スライド番号プレースホルダー 6">
             <a:extLst>
               <a:ext uri="{FF2B5EF4-FFF2-40B4-BE49-F238E27FC236}">
-                <a16:creationId xmlns:a16="http://schemas.microsoft.com/office/drawing/2014/main" id="{568DCB17-86E4-3BF9-F9C7-C04B2BBE7A1B}"/>
+                <a16:creationId xmlns:a16="http://schemas.microsoft.com/office/drawing/2014/main" id="{4C12C7A6-DC49-1661-5482-E90E9A630147}"/>
               </a:ext>
             </a:extLst>
           </p:cNvPr>
@@ -2976,7 +2976,7 @@
           <a:bodyPr/>
           <a:lstStyle/>
           <a:p>
-            <a:fld id="{8006A63A-9CAB-4E2F-8172-2D3D695CD31B}" type="slidenum">
+            <a:fld id="{537599D8-0CB8-4E5D-BC9F-0F9D371EE2FC}" type="slidenum">
               <a:rPr kumimoji="1" lang="ja-JP" altLang="en-US" smtClean="0"/>
               <a:t>‹#›</a:t>
             </a:fld>
@@ -2987,7 +2987,7 @@
     </p:spTree>
     <p:extLst>
       <p:ext uri="{BB962C8B-B14F-4D97-AF65-F5344CB8AC3E}">
-        <p14:creationId xmlns:p14="http://schemas.microsoft.com/office/powerpoint/2010/main" val="637202388"/>
+        <p14:creationId xmlns:p14="http://schemas.microsoft.com/office/powerpoint/2010/main" val="1558527862"/>
       </p:ext>
     </p:extLst>
   </p:cSld>
@@ -3024,7 +3024,7 @@
           <p:cNvPr id="2" name="タイトル プレースホルダー 1">
             <a:extLst>
               <a:ext uri="{FF2B5EF4-FFF2-40B4-BE49-F238E27FC236}">
-                <a16:creationId xmlns:a16="http://schemas.microsoft.com/office/drawing/2014/main" id="{041A2AF7-1225-470D-AC69-AA2307C5C17C}"/>
+                <a16:creationId xmlns:a16="http://schemas.microsoft.com/office/drawing/2014/main" id="{E29DA470-BBD1-A5F2-BF8E-250DF4FE5DC3}"/>
               </a:ext>
             </a:extLst>
           </p:cNvPr>
@@ -3062,7 +3062,7 @@
           <p:cNvPr id="3" name="テキスト プレースホルダー 2">
             <a:extLst>
               <a:ext uri="{FF2B5EF4-FFF2-40B4-BE49-F238E27FC236}">
-                <a16:creationId xmlns:a16="http://schemas.microsoft.com/office/drawing/2014/main" id="{E4B0D637-6518-69FA-83A6-AF293E8727B6}"/>
+                <a16:creationId xmlns:a16="http://schemas.microsoft.com/office/drawing/2014/main" id="{A72294EB-810F-5FAD-77CC-8B5264387C23}"/>
               </a:ext>
             </a:extLst>
           </p:cNvPr>
@@ -3161,7 +3161,7 @@
           <p:cNvPr id="4" name="日付プレースホルダー 3">
             <a:extLst>
               <a:ext uri="{FF2B5EF4-FFF2-40B4-BE49-F238E27FC236}">
-                <a16:creationId xmlns:a16="http://schemas.microsoft.com/office/drawing/2014/main" id="{5C3403A1-DCCD-B1CF-F3F0-1D5C792D02C6}"/>
+                <a16:creationId xmlns:a16="http://schemas.microsoft.com/office/drawing/2014/main" id="{3F716D2A-FBA7-BA9B-F3BB-C1DD50D0AA60}"/>
               </a:ext>
             </a:extLst>
           </p:cNvPr>
@@ -3195,7 +3195,7 @@
             </a:lvl1pPr>
           </a:lstStyle>
           <a:p>
-            <a:fld id="{98DE8F79-B99D-4E54-A19E-CB4CEA7E403A}" type="datetimeFigureOut">
+            <a:fld id="{DF6CADF0-1665-4BC8-B3C5-0BBB871F1254}" type="datetimeFigureOut">
               <a:rPr kumimoji="1" lang="ja-JP" altLang="en-US" smtClean="0"/>
               <a:t>2026/7/30</a:t>
             </a:fld>
@@ -3208,7 +3208,7 @@
           <p:cNvPr id="5" name="フッター プレースホルダー 4">
             <a:extLst>
               <a:ext uri="{FF2B5EF4-FFF2-40B4-BE49-F238E27FC236}">
-                <a16:creationId xmlns:a16="http://schemas.microsoft.com/office/drawing/2014/main" id="{524E9669-0018-D42F-5A2B-4DA0AD718CF7}"/>
+                <a16:creationId xmlns:a16="http://schemas.microsoft.com/office/drawing/2014/main" id="{CF451E9B-8877-6A57-4E3D-BBB8EA0E1EA4}"/>
               </a:ext>
             </a:extLst>
           </p:cNvPr>
@@ -3251,7 +3251,7 @@
           <p:cNvPr id="6" name="スライド番号プレースホルダー 5">
             <a:extLst>
               <a:ext uri="{FF2B5EF4-FFF2-40B4-BE49-F238E27FC236}">
-                <a16:creationId xmlns:a16="http://schemas.microsoft.com/office/drawing/2014/main" id="{83FA8AF8-2869-6AFF-7389-0438107C4337}"/>
+                <a16:creationId xmlns:a16="http://schemas.microsoft.com/office/drawing/2014/main" id="{D20DFBAF-8DBD-62F1-68E3-76D74977395F}"/>
               </a:ext>
             </a:extLst>
           </p:cNvPr>
@@ -3285,7 +3285,7 @@
             </a:lvl1pPr>
           </a:lstStyle>
           <a:p>
-            <a:fld id="{8006A63A-9CAB-4E2F-8172-2D3D695CD31B}" type="slidenum">
+            <a:fld id="{537599D8-0CB8-4E5D-BC9F-0F9D371EE2FC}" type="slidenum">
               <a:rPr kumimoji="1" lang="ja-JP" altLang="en-US" smtClean="0"/>
               <a:t>‹#›</a:t>
             </a:fld>
@@ -3296,7 +3296,7 @@
     </p:spTree>
     <p:extLst>
       <p:ext uri="{BB962C8B-B14F-4D97-AF65-F5344CB8AC3E}">
-        <p14:creationId xmlns:p14="http://schemas.microsoft.com/office/powerpoint/2010/main" val="899869718"/>
+        <p14:creationId xmlns:p14="http://schemas.microsoft.com/office/powerpoint/2010/main" val="2822270170"/>
       </p:ext>
     </p:extLst>
   </p:cSld>
@@ -3619,7 +3619,7 @@
           <p:cNvPr id="2" name="テキスト ボックス 1">
             <a:extLst>
               <a:ext uri="{FF2B5EF4-FFF2-40B4-BE49-F238E27FC236}">
-                <a16:creationId xmlns:a16="http://schemas.microsoft.com/office/drawing/2014/main" id="{E37699C4-4F33-600B-3AD0-2FC316F520CD}"/>
+                <a16:creationId xmlns:a16="http://schemas.microsoft.com/office/drawing/2014/main" id="{0586A8AC-1D27-2E07-B521-E0CCC794458C}"/>
               </a:ext>
             </a:extLst>
           </p:cNvPr>
@@ -3665,7 +3665,7 @@
           <p:cNvPr id="3" name="テキスト ボックス 2">
             <a:extLst>
               <a:ext uri="{FF2B5EF4-FFF2-40B4-BE49-F238E27FC236}">
-                <a16:creationId xmlns:a16="http://schemas.microsoft.com/office/drawing/2014/main" id="{ACF1D282-4447-DF35-DAB1-34E8EA526F39}"/>
+                <a16:creationId xmlns:a16="http://schemas.microsoft.com/office/drawing/2014/main" id="{13C93041-2CD2-9AAA-E586-2F64050B196F}"/>
               </a:ext>
             </a:extLst>
           </p:cNvPr>
@@ -3714,7 +3714,7 @@
           <p:cNvPr id="4" name="テキスト ボックス 3">
             <a:extLst>
               <a:ext uri="{FF2B5EF4-FFF2-40B4-BE49-F238E27FC236}">
-                <a16:creationId xmlns:a16="http://schemas.microsoft.com/office/drawing/2014/main" id="{81C9B25A-792B-08B4-5937-9CB09B529D90}"/>
+                <a16:creationId xmlns:a16="http://schemas.microsoft.com/office/drawing/2014/main" id="{65F92E7B-4501-A962-8755-364F0D15A82B}"/>
               </a:ext>
             </a:extLst>
           </p:cNvPr>
@@ -3754,7 +3754,7 @@
           <p:cNvPr id="5" name="テキスト ボックス 4">
             <a:extLst>
               <a:ext uri="{FF2B5EF4-FFF2-40B4-BE49-F238E27FC236}">
-                <a16:creationId xmlns:a16="http://schemas.microsoft.com/office/drawing/2014/main" id="{4D5C4D2E-A89B-4CB2-3404-E7A8BE70511A}"/>
+                <a16:creationId xmlns:a16="http://schemas.microsoft.com/office/drawing/2014/main" id="{B1838325-937C-C1A4-24FA-914509D108E3}"/>
               </a:ext>
             </a:extLst>
           </p:cNvPr>
@@ -3801,7 +3801,7 @@
             <a:hlinkClick r:id="" action="ppaction://media"/>
             <a:extLst>
               <a:ext uri="{FF2B5EF4-FFF2-40B4-BE49-F238E27FC236}">
-                <a16:creationId xmlns:a16="http://schemas.microsoft.com/office/drawing/2014/main" id="{86334DAE-28D4-25CB-9921-25CFE81CE304}"/>
+                <a16:creationId xmlns:a16="http://schemas.microsoft.com/office/drawing/2014/main" id="{385FA767-AA1D-6230-BC88-AF4040798E5B}"/>
               </a:ext>
             </a:extLst>
           </p:cNvPr>
@@ -3836,7 +3836,7 @@
     </p:spTree>
     <p:extLst>
       <p:ext uri="{BB962C8B-B14F-4D97-AF65-F5344CB8AC3E}">
-        <p14:creationId xmlns:p14="http://schemas.microsoft.com/office/powerpoint/2010/main" val="975795845"/>
+        <p14:creationId xmlns:p14="http://schemas.microsoft.com/office/powerpoint/2010/main" val="4068590086"/>
       </p:ext>
     </p:extLst>
   </p:cSld>
@@ -3960,7 +3960,7 @@
           <p:cNvPr id="2" name="テキスト ボックス 1">
             <a:extLst>
               <a:ext uri="{FF2B5EF4-FFF2-40B4-BE49-F238E27FC236}">
-                <a16:creationId xmlns:a16="http://schemas.microsoft.com/office/drawing/2014/main" id="{14CC7809-9EEB-44B8-2CD2-A660BAEB62D5}"/>
+                <a16:creationId xmlns:a16="http://schemas.microsoft.com/office/drawing/2014/main" id="{0C8DC73A-A6F9-6AD2-7CEE-65B5F3F0D004}"/>
               </a:ext>
             </a:extLst>
           </p:cNvPr>
@@ -4006,7 +4006,7 @@
           <p:cNvPr id="3" name="テキスト ボックス 2">
             <a:extLst>
               <a:ext uri="{FF2B5EF4-FFF2-40B4-BE49-F238E27FC236}">
-                <a16:creationId xmlns:a16="http://schemas.microsoft.com/office/drawing/2014/main" id="{EB8834AB-0E83-2B8E-1AA6-F60FB39270B7}"/>
+                <a16:creationId xmlns:a16="http://schemas.microsoft.com/office/drawing/2014/main" id="{5B559D20-E308-9A54-8CD6-BC858D2FC0E4}"/>
               </a:ext>
             </a:extLst>
           </p:cNvPr>
@@ -4046,7 +4046,7 @@
           <p:cNvPr id="4" name="テキスト ボックス 3">
             <a:extLst>
               <a:ext uri="{FF2B5EF4-FFF2-40B4-BE49-F238E27FC236}">
-                <a16:creationId xmlns:a16="http://schemas.microsoft.com/office/drawing/2014/main" id="{C9F89A75-6487-0656-96B5-B192EA799BDE}"/>
+                <a16:creationId xmlns:a16="http://schemas.microsoft.com/office/drawing/2014/main" id="{BACFB2D4-4069-D656-7B56-0A028147CED0}"/>
               </a:ext>
             </a:extLst>
           </p:cNvPr>
@@ -4095,7 +4095,7 @@
           <p:cNvPr id="5" name="テキスト ボックス 4">
             <a:extLst>
               <a:ext uri="{FF2B5EF4-FFF2-40B4-BE49-F238E27FC236}">
-                <a16:creationId xmlns:a16="http://schemas.microsoft.com/office/drawing/2014/main" id="{294352EE-463F-E212-B9F2-93CCA3C72731}"/>
+                <a16:creationId xmlns:a16="http://schemas.microsoft.com/office/drawing/2014/main" id="{F853F8D8-FAAE-1688-465B-F2FBBB1ABBE4}"/>
               </a:ext>
             </a:extLst>
           </p:cNvPr>
@@ -4142,7 +4142,7 @@
             <a:hlinkClick r:id="" action="ppaction://media"/>
             <a:extLst>
               <a:ext uri="{FF2B5EF4-FFF2-40B4-BE49-F238E27FC236}">
-                <a16:creationId xmlns:a16="http://schemas.microsoft.com/office/drawing/2014/main" id="{F180E858-72FE-D773-75E6-686D387B57C7}"/>
+                <a16:creationId xmlns:a16="http://schemas.microsoft.com/office/drawing/2014/main" id="{0FD2B530-F9CD-FA1F-C934-B45802E0AEC4}"/>
               </a:ext>
             </a:extLst>
           </p:cNvPr>
@@ -4177,7 +4177,7 @@
     </p:spTree>
     <p:extLst>
       <p:ext uri="{BB962C8B-B14F-4D97-AF65-F5344CB8AC3E}">
-        <p14:creationId xmlns:p14="http://schemas.microsoft.com/office/powerpoint/2010/main" val="2592221383"/>
+        <p14:creationId xmlns:p14="http://schemas.microsoft.com/office/powerpoint/2010/main" val="808537604"/>
       </p:ext>
     </p:extLst>
   </p:cSld>
@@ -4301,7 +4301,7 @@
           <p:cNvPr id="2" name="テキスト ボックス 1">
             <a:extLst>
               <a:ext uri="{FF2B5EF4-FFF2-40B4-BE49-F238E27FC236}">
-                <a16:creationId xmlns:a16="http://schemas.microsoft.com/office/drawing/2014/main" id="{20CEF16F-1DA5-EA45-64D2-E53932439295}"/>
+                <a16:creationId xmlns:a16="http://schemas.microsoft.com/office/drawing/2014/main" id="{C01012E5-E344-1DC0-BEAC-356BA330FFED}"/>
               </a:ext>
             </a:extLst>
           </p:cNvPr>
@@ -4347,7 +4347,7 @@
           <p:cNvPr id="3" name="テキスト ボックス 2">
             <a:extLst>
               <a:ext uri="{FF2B5EF4-FFF2-40B4-BE49-F238E27FC236}">
-                <a16:creationId xmlns:a16="http://schemas.microsoft.com/office/drawing/2014/main" id="{7AA4EF76-A770-54E6-6299-2CB8B4209E42}"/>
+                <a16:creationId xmlns:a16="http://schemas.microsoft.com/office/drawing/2014/main" id="{99F15457-5F84-8EA5-2C6B-605C3A502E76}"/>
               </a:ext>
             </a:extLst>
           </p:cNvPr>
@@ -4387,7 +4387,7 @@
           <p:cNvPr id="4" name="テキスト ボックス 3">
             <a:extLst>
               <a:ext uri="{FF2B5EF4-FFF2-40B4-BE49-F238E27FC236}">
-                <a16:creationId xmlns:a16="http://schemas.microsoft.com/office/drawing/2014/main" id="{4FD50745-AE24-BFA0-B5A1-AB923B4246AC}"/>
+                <a16:creationId xmlns:a16="http://schemas.microsoft.com/office/drawing/2014/main" id="{DB8CA1A8-6C33-C6C6-F323-25C746FC8036}"/>
               </a:ext>
             </a:extLst>
           </p:cNvPr>
@@ -4500,7 +4500,7 @@
           <p:cNvPr id="5" name="テキスト ボックス 4">
             <a:extLst>
               <a:ext uri="{FF2B5EF4-FFF2-40B4-BE49-F238E27FC236}">
-                <a16:creationId xmlns:a16="http://schemas.microsoft.com/office/drawing/2014/main" id="{5DCEBFE3-9618-7211-D44F-452DD2726682}"/>
+                <a16:creationId xmlns:a16="http://schemas.microsoft.com/office/drawing/2014/main" id="{E358593A-EAC1-4DC6-4E89-FE4F68DCB836}"/>
               </a:ext>
             </a:extLst>
           </p:cNvPr>
@@ -4547,7 +4547,7 @@
             <a:hlinkClick r:id="" action="ppaction://media"/>
             <a:extLst>
               <a:ext uri="{FF2B5EF4-FFF2-40B4-BE49-F238E27FC236}">
-                <a16:creationId xmlns:a16="http://schemas.microsoft.com/office/drawing/2014/main" id="{5C49D2E8-3113-324D-1014-4DA105F539C7}"/>
+                <a16:creationId xmlns:a16="http://schemas.microsoft.com/office/drawing/2014/main" id="{CAE1ECB0-2AED-FF04-02E4-55C34324BE96}"/>
               </a:ext>
             </a:extLst>
           </p:cNvPr>
@@ -4582,7 +4582,7 @@
     </p:spTree>
     <p:extLst>
       <p:ext uri="{BB962C8B-B14F-4D97-AF65-F5344CB8AC3E}">
-        <p14:creationId xmlns:p14="http://schemas.microsoft.com/office/powerpoint/2010/main" val="4134864237"/>
+        <p14:creationId xmlns:p14="http://schemas.microsoft.com/office/powerpoint/2010/main" val="1571522296"/>
       </p:ext>
     </p:extLst>
   </p:cSld>
@@ -4706,7 +4706,7 @@
           <p:cNvPr id="2" name="テキスト ボックス 1">
             <a:extLst>
               <a:ext uri="{FF2B5EF4-FFF2-40B4-BE49-F238E27FC236}">
-                <a16:creationId xmlns:a16="http://schemas.microsoft.com/office/drawing/2014/main" id="{0D8ED2F5-53C9-1090-DA8B-9A09B9876A8E}"/>
+                <a16:creationId xmlns:a16="http://schemas.microsoft.com/office/drawing/2014/main" id="{C05B0C57-81A5-028F-D232-98D9246DD6C9}"/>
               </a:ext>
             </a:extLst>
           </p:cNvPr>
@@ -4752,7 +4752,7 @@
           <p:cNvPr id="3" name="テキスト ボックス 2">
             <a:extLst>
               <a:ext uri="{FF2B5EF4-FFF2-40B4-BE49-F238E27FC236}">
-                <a16:creationId xmlns:a16="http://schemas.microsoft.com/office/drawing/2014/main" id="{368FCC41-BA02-0D21-3B35-9BF76FFB2708}"/>
+                <a16:creationId xmlns:a16="http://schemas.microsoft.com/office/drawing/2014/main" id="{CEC18180-EB05-1CB1-01F7-C77937E5A659}"/>
               </a:ext>
             </a:extLst>
           </p:cNvPr>
@@ -4792,7 +4792,7 @@
           <p:cNvPr id="4" name="テキスト ボックス 3">
             <a:extLst>
               <a:ext uri="{FF2B5EF4-FFF2-40B4-BE49-F238E27FC236}">
-                <a16:creationId xmlns:a16="http://schemas.microsoft.com/office/drawing/2014/main" id="{87F0E07E-B938-4DD2-206A-4708ADA332A1}"/>
+                <a16:creationId xmlns:a16="http://schemas.microsoft.com/office/drawing/2014/main" id="{A7AF46AB-4AF6-51F4-2D8F-54294F9488BF}"/>
               </a:ext>
             </a:extLst>
           </p:cNvPr>
@@ -4866,7 +4866,7 @@
           <p:cNvPr id="5" name="テキスト ボックス 4">
             <a:extLst>
               <a:ext uri="{FF2B5EF4-FFF2-40B4-BE49-F238E27FC236}">
-                <a16:creationId xmlns:a16="http://schemas.microsoft.com/office/drawing/2014/main" id="{B7F5A7EB-C07A-87A0-CAB9-369BC80AC302}"/>
+                <a16:creationId xmlns:a16="http://schemas.microsoft.com/office/drawing/2014/main" id="{0DF45E53-A020-8C52-FA1E-AA4A22B636EC}"/>
               </a:ext>
             </a:extLst>
           </p:cNvPr>
@@ -4913,7 +4913,7 @@
             <a:hlinkClick r:id="" action="ppaction://media"/>
             <a:extLst>
               <a:ext uri="{FF2B5EF4-FFF2-40B4-BE49-F238E27FC236}">
-                <a16:creationId xmlns:a16="http://schemas.microsoft.com/office/drawing/2014/main" id="{7CFDA1C2-C884-ADC2-3C2E-70542269F273}"/>
+                <a16:creationId xmlns:a16="http://schemas.microsoft.com/office/drawing/2014/main" id="{F346E785-121C-A825-4EE8-B531BAB79B98}"/>
               </a:ext>
             </a:extLst>
           </p:cNvPr>
@@ -4948,7 +4948,7 @@
     </p:spTree>
     <p:extLst>
       <p:ext uri="{BB962C8B-B14F-4D97-AF65-F5344CB8AC3E}">
-        <p14:creationId xmlns:p14="http://schemas.microsoft.com/office/powerpoint/2010/main" val="3278955589"/>
+        <p14:creationId xmlns:p14="http://schemas.microsoft.com/office/powerpoint/2010/main" val="4289027958"/>
       </p:ext>
     </p:extLst>
   </p:cSld>
@@ -5072,7 +5072,7 @@
           <p:cNvPr id="2" name="テキスト ボックス 1">
             <a:extLst>
               <a:ext uri="{FF2B5EF4-FFF2-40B4-BE49-F238E27FC236}">
-                <a16:creationId xmlns:a16="http://schemas.microsoft.com/office/drawing/2014/main" id="{07F1F565-F5F3-33A8-2DD5-3107E5AD886B}"/>
+                <a16:creationId xmlns:a16="http://schemas.microsoft.com/office/drawing/2014/main" id="{204FCE0F-3E25-4EA3-D2E0-3D5C73D0462E}"/>
               </a:ext>
             </a:extLst>
           </p:cNvPr>
@@ -5118,7 +5118,7 @@
           <p:cNvPr id="3" name="テキスト ボックス 2">
             <a:extLst>
               <a:ext uri="{FF2B5EF4-FFF2-40B4-BE49-F238E27FC236}">
-                <a16:creationId xmlns:a16="http://schemas.microsoft.com/office/drawing/2014/main" id="{FF50F78A-D446-80D1-2668-8FAF331A0C74}"/>
+                <a16:creationId xmlns:a16="http://schemas.microsoft.com/office/drawing/2014/main" id="{B5E69CAB-371C-042D-F046-56F081A129AF}"/>
               </a:ext>
             </a:extLst>
           </p:cNvPr>
@@ -5158,7 +5158,7 @@
           <p:cNvPr id="4" name="テキスト ボックス 3">
             <a:extLst>
               <a:ext uri="{FF2B5EF4-FFF2-40B4-BE49-F238E27FC236}">
-                <a16:creationId xmlns:a16="http://schemas.microsoft.com/office/drawing/2014/main" id="{EB3B139C-CC4E-BA0E-5323-53E282B10BF2}"/>
+                <a16:creationId xmlns:a16="http://schemas.microsoft.com/office/drawing/2014/main" id="{B985958A-E3CA-DA8A-020A-7F9A52168720}"/>
               </a:ext>
             </a:extLst>
           </p:cNvPr>
@@ -5168,7 +5168,7 @@
         <p:spPr>
           <a:xfrm>
             <a:off x="533400" y="3429000"/>
-            <a:ext cx="10795000" cy="707886"/>
+            <a:ext cx="10795000" cy="400110"/>
           </a:xfrm>
           <a:prstGeom prst="rect">
             <a:avLst/>
@@ -5182,76 +5182,13 @@
           <a:lstStyle/>
           <a:p>
             <a:r>
-              <a:rPr kumimoji="1" lang="en-US" altLang="ja-JP" sz="2000">
-                <a:solidFill>
-                  <a:srgbClr val="333333"/>
-                </a:solidFill>
-                <a:latin typeface="Arial" panose="020B0604020202020204" pitchFamily="34" charset="0"/>
-              </a:rPr>
-              <a:t>JSON-LD</a:t>
-            </a:r>
-            <a:r>
               <a:rPr kumimoji="1" lang="ja-JP" altLang="en-US" sz="2000">
                 <a:solidFill>
                   <a:srgbClr val="333333"/>
                 </a:solidFill>
                 <a:latin typeface="Arial" panose="020B0604020202020204" pitchFamily="34" charset="0"/>
               </a:rPr>
-              <a:t>の</a:t>
-            </a:r>
-            <a:r>
-              <a:rPr kumimoji="1" lang="en-US" altLang="ja-JP" sz="2000">
-                <a:solidFill>
-                  <a:srgbClr val="333333"/>
-                </a:solidFill>
-                <a:latin typeface="Arial" panose="020B0604020202020204" pitchFamily="34" charset="0"/>
-              </a:rPr>
-              <a:t>blade</a:t>
-            </a:r>
-            <a:r>
-              <a:rPr kumimoji="1" lang="ja-JP" altLang="en-US" sz="2000">
-                <a:solidFill>
-                  <a:srgbClr val="333333"/>
-                </a:solidFill>
-                <a:latin typeface="Arial" panose="020B0604020202020204" pitchFamily="34" charset="0"/>
-              </a:rPr>
-              <a:t>テンプレートで</a:t>
-            </a:r>
-            <a:r>
-              <a:rPr kumimoji="1" lang="en-US" altLang="ja-JP" sz="2000">
-                <a:solidFill>
-                  <a:srgbClr val="333333"/>
-                </a:solidFill>
-                <a:latin typeface="Arial" panose="020B0604020202020204" pitchFamily="34" charset="0"/>
-              </a:rPr>
-              <a:t>@context</a:t>
-            </a:r>
-            <a:r>
-              <a:rPr kumimoji="1" lang="ja-JP" altLang="en-US" sz="2000">
-                <a:solidFill>
-                  <a:srgbClr val="333333"/>
-                </a:solidFill>
-                <a:latin typeface="Arial" panose="020B0604020202020204" pitchFamily="34" charset="0"/>
-              </a:rPr>
-              <a:t>が</a:t>
-            </a:r>
-            <a:r>
-              <a:rPr kumimoji="1" lang="en-US" altLang="ja-JP" sz="2000">
-                <a:solidFill>
-                  <a:srgbClr val="333333"/>
-                </a:solidFill>
-                <a:latin typeface="Arial" panose="020B0604020202020204" pitchFamily="34" charset="0"/>
-              </a:rPr>
-              <a:t>Laravel</a:t>
-            </a:r>
-            <a:r>
-              <a:rPr kumimoji="1" lang="ja-JP" altLang="en-US" sz="2000">
-                <a:solidFill>
-                  <a:srgbClr val="333333"/>
-                </a:solidFill>
-                <a:latin typeface="Arial" panose="020B0604020202020204" pitchFamily="34" charset="0"/>
-              </a:rPr>
-              <a:t>の予約ディレクティブと衝突していたバグを修正</a:t>
+              <a:t>直近のコミットでは、実装の見直しと継続的な改善が行われました。</a:t>
             </a:r>
           </a:p>
         </p:txBody>
@@ -5261,7 +5198,7 @@
           <p:cNvPr id="5" name="テキスト ボックス 4">
             <a:extLst>
               <a:ext uri="{FF2B5EF4-FFF2-40B4-BE49-F238E27FC236}">
-                <a16:creationId xmlns:a16="http://schemas.microsoft.com/office/drawing/2014/main" id="{806B4014-5426-894F-131E-B8A3928168BD}"/>
+                <a16:creationId xmlns:a16="http://schemas.microsoft.com/office/drawing/2014/main" id="{861F2AB3-42E0-A88F-53EB-4EEFFFBDC136}"/>
               </a:ext>
             </a:extLst>
           </p:cNvPr>
@@ -5308,7 +5245,7 @@
             <a:hlinkClick r:id="" action="ppaction://media"/>
             <a:extLst>
               <a:ext uri="{FF2B5EF4-FFF2-40B4-BE49-F238E27FC236}">
-                <a16:creationId xmlns:a16="http://schemas.microsoft.com/office/drawing/2014/main" id="{FF22E16B-8E73-19BD-CDB6-28AE23F7978D}"/>
+                <a16:creationId xmlns:a16="http://schemas.microsoft.com/office/drawing/2014/main" id="{E354BA48-D46B-6AE7-DFCD-681471277234}"/>
               </a:ext>
             </a:extLst>
           </p:cNvPr>
@@ -5343,7 +5280,7 @@
     </p:spTree>
     <p:extLst>
       <p:ext uri="{BB962C8B-B14F-4D97-AF65-F5344CB8AC3E}">
-        <p14:creationId xmlns:p14="http://schemas.microsoft.com/office/powerpoint/2010/main" val="2122087110"/>
+        <p14:creationId xmlns:p14="http://schemas.microsoft.com/office/powerpoint/2010/main" val="883310211"/>
       </p:ext>
     </p:extLst>
   </p:cSld>
@@ -5352,10 +5289,10 @@
   </p:clrMapOvr>
   <mc:AlternateContent xmlns:mc="http://schemas.openxmlformats.org/markup-compatibility/2006">
     <mc:Choice xmlns:p14="http://schemas.microsoft.com/office/powerpoint/2010/main" Requires="p14">
-      <p:transition spd="slow" p14:dur="2000" advTm="12000"/>
+      <p:transition spd="slow" p14:dur="2000" advTm="7000"/>
     </mc:Choice>
     <mc:Fallback>
-      <p:transition spd="slow" advTm="12000"/>
+      <p:transition spd="slow" advTm="7000"/>
     </mc:Fallback>
   </mc:AlternateContent>
   <p:timing>
@@ -5386,7 +5323,7 @@
                                   <p:childTnLst>
                                     <p:cmd type="call" cmd="playFrom(0.0)">
                                       <p:cBhvr>
-                                        <p:cTn id="6" dur="11394" fill="hold"/>
+                                        <p:cTn id="6" dur="6076" fill="hold"/>
                                         <p:tgtEl>
                                           <p:spTgt spid="6"/>
                                         </p:tgtEl>
@@ -5467,7 +5404,7 @@
           <p:cNvPr id="2" name="テキスト ボックス 1">
             <a:extLst>
               <a:ext uri="{FF2B5EF4-FFF2-40B4-BE49-F238E27FC236}">
-                <a16:creationId xmlns:a16="http://schemas.microsoft.com/office/drawing/2014/main" id="{FC250AD7-5617-FA4C-1C2A-63C62F339EA2}"/>
+                <a16:creationId xmlns:a16="http://schemas.microsoft.com/office/drawing/2014/main" id="{B5A0E7FD-12F7-5CAB-0F69-B24D9C3DF842}"/>
               </a:ext>
             </a:extLst>
           </p:cNvPr>
@@ -5513,7 +5450,7 @@
           <p:cNvPr id="3" name="テキスト ボックス 2">
             <a:extLst>
               <a:ext uri="{FF2B5EF4-FFF2-40B4-BE49-F238E27FC236}">
-                <a16:creationId xmlns:a16="http://schemas.microsoft.com/office/drawing/2014/main" id="{8F6AB6BC-143B-B74F-F0BD-9DDA8C565C0A}"/>
+                <a16:creationId xmlns:a16="http://schemas.microsoft.com/office/drawing/2014/main" id="{11D5583E-892A-943D-5A39-AD16F249466F}"/>
               </a:ext>
             </a:extLst>
           </p:cNvPr>
@@ -5553,7 +5490,7 @@
           <p:cNvPr id="4" name="テキスト ボックス 3">
             <a:extLst>
               <a:ext uri="{FF2B5EF4-FFF2-40B4-BE49-F238E27FC236}">
-                <a16:creationId xmlns:a16="http://schemas.microsoft.com/office/drawing/2014/main" id="{944F8CE1-9A77-BF7E-441A-955BD09FF3E9}"/>
+                <a16:creationId xmlns:a16="http://schemas.microsoft.com/office/drawing/2014/main" id="{BB7A861D-A055-089C-0DB7-0975B0C15DE8}"/>
               </a:ext>
             </a:extLst>
           </p:cNvPr>
@@ -5618,7 +5555,7 @@
           <p:cNvPr id="5" name="テキスト ボックス 4">
             <a:extLst>
               <a:ext uri="{FF2B5EF4-FFF2-40B4-BE49-F238E27FC236}">
-                <a16:creationId xmlns:a16="http://schemas.microsoft.com/office/drawing/2014/main" id="{3CA2DD21-D051-DCED-56CD-CDDB7B46210E}"/>
+                <a16:creationId xmlns:a16="http://schemas.microsoft.com/office/drawing/2014/main" id="{9FEBA1D0-454B-9570-8E94-6E2CA500E30B}"/>
               </a:ext>
             </a:extLst>
           </p:cNvPr>
@@ -5665,7 +5602,7 @@
             <a:hlinkClick r:id="" action="ppaction://media"/>
             <a:extLst>
               <a:ext uri="{FF2B5EF4-FFF2-40B4-BE49-F238E27FC236}">
-                <a16:creationId xmlns:a16="http://schemas.microsoft.com/office/drawing/2014/main" id="{99B9E3A7-EBCF-0CDD-DBF4-783946959D49}"/>
+                <a16:creationId xmlns:a16="http://schemas.microsoft.com/office/drawing/2014/main" id="{81B09919-F59E-6DEA-75C0-9207151029D2}"/>
               </a:ext>
             </a:extLst>
           </p:cNvPr>
@@ -5700,7 +5637,7 @@
     </p:spTree>
     <p:extLst>
       <p:ext uri="{BB962C8B-B14F-4D97-AF65-F5344CB8AC3E}">
-        <p14:creationId xmlns:p14="http://schemas.microsoft.com/office/powerpoint/2010/main" val="2877406358"/>
+        <p14:creationId xmlns:p14="http://schemas.microsoft.com/office/powerpoint/2010/main" val="770756747"/>
       </p:ext>
     </p:extLst>
   </p:cSld>
